--- a/@Materi Kuliah/Materi_Analisis_Regresi_Tingkat_Lanjut/Presentasi_Analisis_Regresi_Tingkat_Lanjut_Profesional_dari_HTML.pptx
+++ b/@Materi Kuliah/Materi_Analisis_Regresi_Tingkat_Lanjut/Presentasi_Analisis_Regresi_Tingkat_Lanjut_Profesional_dari_HTML.pptx
@@ -2,131 +2,36 @@
 <file path=ppt/presentation.xml><?xml version="1.0" encoding="utf-8"?>
 <p:presentation xmlns:p="http://schemas.openxmlformats.org/presentationml/2006/main">
   <p:sldMasterIdLst>
-    <p:sldMasterId xmlns:r="http://schemas.openxmlformats.org/officeDocument/2006/relationships" id="2147483648" r:id="R4a1c1eb828f44163"/>
+    <p:sldMasterId xmlns:r="http://schemas.openxmlformats.org/officeDocument/2006/relationships" id="2147483648" r:id="Rb36ebfe0743749c2"/>
   </p:sldMasterIdLst>
   <p:notesMasterIdLst>
-    <p:notesMasterId xmlns:r="http://schemas.openxmlformats.org/officeDocument/2006/relationships" r:id="R2233b71ed6ec4bb3"/>
+    <p:notesMasterId xmlns:r="http://schemas.openxmlformats.org/officeDocument/2006/relationships" r:id="Rab5001a383674d69"/>
   </p:notesMasterIdLst>
   <p:sldIdLst>
-    <p:sldId xmlns:r="http://schemas.openxmlformats.org/officeDocument/2006/relationships" id="256" r:id="Rd35fc079c7424f35"/>
-    <p:sldId xmlns:r="http://schemas.openxmlformats.org/officeDocument/2006/relationships" id="257" r:id="R0eb4c224abb049a9"/>
-    <p:sldId xmlns:r="http://schemas.openxmlformats.org/officeDocument/2006/relationships" id="258" r:id="Rfcca327082734c90"/>
-    <p:sldId xmlns:r="http://schemas.openxmlformats.org/officeDocument/2006/relationships" id="259" r:id="Raf0d3de721a54c21"/>
-    <p:sldId xmlns:r="http://schemas.openxmlformats.org/officeDocument/2006/relationships" id="260" r:id="Rdd0d9e59577d4126"/>
-    <p:sldId xmlns:r="http://schemas.openxmlformats.org/officeDocument/2006/relationships" id="261" r:id="R72d7d7bd7ce84e18"/>
-    <p:sldId xmlns:r="http://schemas.openxmlformats.org/officeDocument/2006/relationships" id="262" r:id="Rf4b9f06fb8784ade"/>
-    <p:sldId xmlns:r="http://schemas.openxmlformats.org/officeDocument/2006/relationships" id="263" r:id="R6f9bec7fdeba4e9e"/>
-    <p:sldId xmlns:r="http://schemas.openxmlformats.org/officeDocument/2006/relationships" id="264" r:id="Rcd93d5d3222d4e95"/>
-    <p:sldId xmlns:r="http://schemas.openxmlformats.org/officeDocument/2006/relationships" id="265" r:id="R5fe0f21345dd4b36"/>
-    <p:sldId xmlns:r="http://schemas.openxmlformats.org/officeDocument/2006/relationships" id="266" r:id="R8a4677daece04544"/>
-    <p:sldId xmlns:r="http://schemas.openxmlformats.org/officeDocument/2006/relationships" id="267" r:id="R9ec5d5f424274a5f"/>
-    <p:sldId xmlns:r="http://schemas.openxmlformats.org/officeDocument/2006/relationships" id="268" r:id="Rccf0eff7872a4351"/>
-    <p:sldId xmlns:r="http://schemas.openxmlformats.org/officeDocument/2006/relationships" id="269" r:id="R12df998d69e744ef"/>
-    <p:sldId xmlns:r="http://schemas.openxmlformats.org/officeDocument/2006/relationships" id="270" r:id="Rae4a1ffc08234143"/>
-    <p:sldId xmlns:r="http://schemas.openxmlformats.org/officeDocument/2006/relationships" id="271" r:id="Rd70c162d971d45d6"/>
-    <p:sldId xmlns:r="http://schemas.openxmlformats.org/officeDocument/2006/relationships" id="272" r:id="R2ff099e4b05a4541"/>
-    <p:sldId xmlns:r="http://schemas.openxmlformats.org/officeDocument/2006/relationships" id="273" r:id="Re0faf327c2054561"/>
-    <p:sldId xmlns:r="http://schemas.openxmlformats.org/officeDocument/2006/relationships" id="274" r:id="Rac9440c52de646d7"/>
-    <p:sldId xmlns:r="http://schemas.openxmlformats.org/officeDocument/2006/relationships" id="275" r:id="R08ee089e90614510"/>
-    <p:sldId xmlns:r="http://schemas.openxmlformats.org/officeDocument/2006/relationships" id="276" r:id="Rad264c619b9f48d0"/>
+    <p:sldId xmlns:r="http://schemas.openxmlformats.org/officeDocument/2006/relationships" id="256" r:id="R412b556978654398"/>
+    <p:sldId xmlns:r="http://schemas.openxmlformats.org/officeDocument/2006/relationships" id="257" r:id="Rc8427db0b52649ec"/>
+    <p:sldId xmlns:r="http://schemas.openxmlformats.org/officeDocument/2006/relationships" id="258" r:id="R9c023fe101f74948"/>
+    <p:sldId xmlns:r="http://schemas.openxmlformats.org/officeDocument/2006/relationships" id="259" r:id="R582cbca433a14ddb"/>
+    <p:sldId xmlns:r="http://schemas.openxmlformats.org/officeDocument/2006/relationships" id="260" r:id="Re136ddc834df4271"/>
+    <p:sldId xmlns:r="http://schemas.openxmlformats.org/officeDocument/2006/relationships" id="261" r:id="R1552b4d095fb4cfc"/>
+    <p:sldId xmlns:r="http://schemas.openxmlformats.org/officeDocument/2006/relationships" id="262" r:id="Rb899453b551941e7"/>
+    <p:sldId xmlns:r="http://schemas.openxmlformats.org/officeDocument/2006/relationships" id="263" r:id="R20b4841c173b4960"/>
+    <p:sldId xmlns:r="http://schemas.openxmlformats.org/officeDocument/2006/relationships" id="264" r:id="Reecc37d2dc294a1c"/>
+    <p:sldId xmlns:r="http://schemas.openxmlformats.org/officeDocument/2006/relationships" id="265" r:id="R9e45f55e7ed142e1"/>
+    <p:sldId xmlns:r="http://schemas.openxmlformats.org/officeDocument/2006/relationships" id="266" r:id="Rcb7b868a151d4863"/>
+    <p:sldId xmlns:r="http://schemas.openxmlformats.org/officeDocument/2006/relationships" id="267" r:id="R46e307a3892440ac"/>
+    <p:sldId xmlns:r="http://schemas.openxmlformats.org/officeDocument/2006/relationships" id="268" r:id="Rd177a63e5822461c"/>
+    <p:sldId xmlns:r="http://schemas.openxmlformats.org/officeDocument/2006/relationships" id="269" r:id="R3ff64e25aff04e90"/>
+    <p:sldId xmlns:r="http://schemas.openxmlformats.org/officeDocument/2006/relationships" id="270" r:id="Rff57a9b8852b4b9c"/>
+    <p:sldId xmlns:r="http://schemas.openxmlformats.org/officeDocument/2006/relationships" id="271" r:id="Re429d842de144214"/>
+    <p:sldId xmlns:r="http://schemas.openxmlformats.org/officeDocument/2006/relationships" id="272" r:id="R62fcffc11f5e487d"/>
+    <p:sldId xmlns:r="http://schemas.openxmlformats.org/officeDocument/2006/relationships" id="273" r:id="R13668667085f4313"/>
+    <p:sldId xmlns:r="http://schemas.openxmlformats.org/officeDocument/2006/relationships" id="274" r:id="R82e1a85e70a24493"/>
+    <p:sldId xmlns:r="http://schemas.openxmlformats.org/officeDocument/2006/relationships" id="275" r:id="Rf6d22f4f97844e9e"/>
+    <p:sldId xmlns:r="http://schemas.openxmlformats.org/officeDocument/2006/relationships" id="276" r:id="R5c4eadae8dca41ac"/>
   </p:sldIdLst>
   <p:sldSz cx="12192000" cy="6858000"/>
   <p:notesSz cx="6858000" cy="9144000"/>
-  <p:defaultTextStyle>
-    <a:defPPr xmlns:a="http://schemas.openxmlformats.org/drawingml/2006/main">
-      <a:defRPr lang="en-US"/>
-    </a:defPPr>
-    <a:lvl1pPr xmlns:a="http://schemas.openxmlformats.org/drawingml/2006/main" marL="0" indent="0" algn="l" defTabSz="914400">
-      <a:defRPr sz="1800" kern="1200">
-        <a:solidFill>
-          <a:schemeClr val="tx1"/>
-        </a:solidFill>
-        <a:latin typeface="+mn-lt"/>
-        <a:ea typeface="+mn-ea"/>
-        <a:cs typeface="+mn-cs"/>
-      </a:defRPr>
-    </a:lvl1pPr>
-    <a:lvl2pPr xmlns:a="http://schemas.openxmlformats.org/drawingml/2006/main" marL="457200" indent="0" algn="l" defTabSz="914400">
-      <a:defRPr sz="1800" kern="1200">
-        <a:solidFill>
-          <a:schemeClr val="tx1"/>
-        </a:solidFill>
-        <a:latin typeface="+mn-lt"/>
-        <a:ea typeface="+mn-ea"/>
-        <a:cs typeface="+mn-cs"/>
-      </a:defRPr>
-    </a:lvl2pPr>
-    <a:lvl3pPr xmlns:a="http://schemas.openxmlformats.org/drawingml/2006/main" marL="914400" indent="0" algn="l" defTabSz="914400">
-      <a:defRPr sz="1800" kern="1200">
-        <a:solidFill>
-          <a:schemeClr val="tx1"/>
-        </a:solidFill>
-        <a:latin typeface="+mn-lt"/>
-        <a:ea typeface="+mn-ea"/>
-        <a:cs typeface="+mn-cs"/>
-      </a:defRPr>
-    </a:lvl3pPr>
-    <a:lvl4pPr xmlns:a="http://schemas.openxmlformats.org/drawingml/2006/main" marL="1371600" indent="0" algn="l" defTabSz="914400">
-      <a:defRPr sz="1800" kern="1200">
-        <a:solidFill>
-          <a:schemeClr val="tx1"/>
-        </a:solidFill>
-        <a:latin typeface="+mn-lt"/>
-        <a:ea typeface="+mn-ea"/>
-        <a:cs typeface="+mn-cs"/>
-      </a:defRPr>
-    </a:lvl4pPr>
-    <a:lvl5pPr xmlns:a="http://schemas.openxmlformats.org/drawingml/2006/main" marL="1828800" indent="0" algn="l" defTabSz="914400">
-      <a:defRPr sz="1800" kern="1200">
-        <a:solidFill>
-          <a:schemeClr val="tx1"/>
-        </a:solidFill>
-        <a:latin typeface="+mn-lt"/>
-        <a:ea typeface="+mn-ea"/>
-        <a:cs typeface="+mn-cs"/>
-      </a:defRPr>
-    </a:lvl5pPr>
-    <a:lvl6pPr xmlns:a="http://schemas.openxmlformats.org/drawingml/2006/main" marL="2286000" indent="0" algn="l" defTabSz="914400">
-      <a:defRPr sz="1800" kern="1200">
-        <a:solidFill>
-          <a:schemeClr val="tx1"/>
-        </a:solidFill>
-        <a:latin typeface="+mn-lt"/>
-        <a:ea typeface="+mn-ea"/>
-        <a:cs typeface="+mn-cs"/>
-      </a:defRPr>
-    </a:lvl6pPr>
-    <a:lvl7pPr xmlns:a="http://schemas.openxmlformats.org/drawingml/2006/main" marL="2743200" indent="0" algn="l" defTabSz="914400">
-      <a:defRPr sz="1800" kern="1200">
-        <a:solidFill>
-          <a:schemeClr val="tx1"/>
-        </a:solidFill>
-        <a:latin typeface="+mn-lt"/>
-        <a:ea typeface="+mn-ea"/>
-        <a:cs typeface="+mn-cs"/>
-      </a:defRPr>
-    </a:lvl7pPr>
-    <a:lvl8pPr xmlns:a="http://schemas.openxmlformats.org/drawingml/2006/main" marL="3200400" indent="0" algn="l" defTabSz="914400">
-      <a:defRPr sz="1800" kern="1200">
-        <a:solidFill>
-          <a:schemeClr val="tx1"/>
-        </a:solidFill>
-        <a:latin typeface="+mn-lt"/>
-        <a:ea typeface="+mn-ea"/>
-        <a:cs typeface="+mn-cs"/>
-      </a:defRPr>
-    </a:lvl8pPr>
-    <a:lvl9pPr xmlns:a="http://schemas.openxmlformats.org/drawingml/2006/main" marL="3657600" indent="0" algn="l" defTabSz="914400">
-      <a:defRPr sz="1800" kern="1200">
-        <a:solidFill>
-          <a:schemeClr val="tx1"/>
-        </a:solidFill>
-        <a:latin typeface="+mn-lt"/>
-        <a:ea typeface="+mn-ea"/>
-        <a:cs typeface="+mn-cs"/>
-      </a:defRPr>
-    </a:lvl9pPr>
-  </p:defaultTextStyle>
 </p:presentation>
 </file>
 
@@ -1453,7 +1358,26 @@
         <p:txBody>
           <a:bodyPr xmlns:a="http://schemas.openxmlformats.org/drawingml/2006/main"/>
           <a:lstStyle xmlns:a="http://schemas.openxmlformats.org/drawingml/2006/main"/>
-          <a:p xmlns:a="http://schemas.openxmlformats.org/drawingml/2006/main"/>
+          <a:p xmlns:a="http://schemas.openxmlformats.org/drawingml/2006/main">
+            <a:r>
+              <a:t>[Sources]</a:t>
+            </a:r>
+          </a:p>
+          <a:p xmlns:a="http://schemas.openxmlformats.org/drawingml/2006/main">
+            <a:r>
+              <a:t>- RPS mata kuliah Revisi AI 2026, Program Studi S2 Statistika Terapan FMIPA Universitas Padjadjaran.</a:t>
+            </a:r>
+          </a:p>
+          <a:p xmlns:a="http://schemas.openxmlformats.org/drawingml/2006/main">
+            <a:r>
+              <a:t>[/Sources]</a:t>
+            </a:r>
+          </a:p>
+          <a:p xmlns:a="http://schemas.openxmlformats.org/drawingml/2006/main">
+            <a:r>
+              <a:t>Penutup: CPL tetap. AI adalah akselerator ketercapaian CPMK/Sub-CPMK, bukan pengganti penalaran statistika. Tekankan kewajiban prompt log ringkas, sumber, kode/notebook reproducible, validasi, dan audit trail.</a:t>
+            </a:r>
+          </a:p>
         </p:txBody>
       </p:sp>
       <p:sp>
@@ -2010,8 +1934,8 @@
   </p:cSld>
   <p:clrMap bg1="lt1" tx1="dk1" bg2="lt2" tx2="dk2" accent1="accent1" accent2="accent2" accent3="accent3" accent4="accent4" accent5="accent5" accent6="accent6" hlink="hlink" folHlink="folHlink"/>
   <p:sldLayoutIdLst>
-    <p:sldLayoutId xmlns:r="http://schemas.openxmlformats.org/officeDocument/2006/relationships" id="2147483649" r:id="Rab2d4db0fa4448c7"/>
-    <p:sldLayoutId xmlns:r="http://schemas.openxmlformats.org/officeDocument/2006/relationships" id="2147483650" r:id="R931e812a2951438f"/>
+    <p:sldLayoutId xmlns:r="http://schemas.openxmlformats.org/officeDocument/2006/relationships" id="2147483649" r:id="Rf566b7492db847ce"/>
+    <p:sldLayoutId xmlns:r="http://schemas.openxmlformats.org/officeDocument/2006/relationships" id="2147483650" r:id="R73c7470e98a64ee3"/>
   </p:sldLayoutIdLst>
   <p:hf sldNum="0" hdr="0" ftr="0" dt="0"/>
   <p:txStyles>
@@ -2577,7 +2501,7 @@
           <p:nvPr/>
         </p:nvPicPr>
         <p:blipFill>
-          <a:blip xmlns:r="http://schemas.openxmlformats.org/officeDocument/2006/relationships" xmlns:a="http://schemas.openxmlformats.org/drawingml/2006/main" r:embed="R660e883768aa40bf"/>
+          <a:blip xmlns:r="http://schemas.openxmlformats.org/officeDocument/2006/relationships" xmlns:a="http://schemas.openxmlformats.org/drawingml/2006/main" r:embed="R33daae2f2520478c"/>
           <a:stretch xmlns:a="http://schemas.openxmlformats.org/drawingml/2006/main">
             <a:fillRect l="0" t="0" r="0" b="0"/>
           </a:stretch>
@@ -2723,7 +2647,7 @@
           <p:nvPr/>
         </p:nvPicPr>
         <p:blipFill>
-          <a:blip xmlns:r="http://schemas.openxmlformats.org/officeDocument/2006/relationships" xmlns:a="http://schemas.openxmlformats.org/drawingml/2006/main" r:embed="R85c506322afb42d8"/>
+          <a:blip xmlns:r="http://schemas.openxmlformats.org/officeDocument/2006/relationships" xmlns:a="http://schemas.openxmlformats.org/drawingml/2006/main" r:embed="Rd46f6ab9f3d04e5c"/>
           <a:stretch xmlns:a="http://schemas.openxmlformats.org/drawingml/2006/main">
             <a:fillRect l="0" t="0" r="0" b="0"/>
           </a:stretch>
@@ -3345,7 +3269,7 @@
           <p:nvPr/>
         </p:nvPicPr>
         <p:blipFill>
-          <a:blip xmlns:r="http://schemas.openxmlformats.org/officeDocument/2006/relationships" xmlns:a="http://schemas.openxmlformats.org/drawingml/2006/main" r:embed="Rb9e54f52f0b6490c"/>
+          <a:blip xmlns:r="http://schemas.openxmlformats.org/officeDocument/2006/relationships" xmlns:a="http://schemas.openxmlformats.org/drawingml/2006/main" r:embed="R55726f12a956449a"/>
           <a:stretch xmlns:a="http://schemas.openxmlformats.org/drawingml/2006/main">
             <a:fillRect l="0" t="0" r="0" b="0"/>
           </a:stretch>
@@ -5495,7 +5419,7 @@
           <p:nvPr/>
         </p:nvPicPr>
         <p:blipFill>
-          <a:blip xmlns:r="http://schemas.openxmlformats.org/officeDocument/2006/relationships" xmlns:a="http://schemas.openxmlformats.org/drawingml/2006/main" r:embed="R2c8dd6a24e9044d0"/>
+          <a:blip xmlns:r="http://schemas.openxmlformats.org/officeDocument/2006/relationships" xmlns:a="http://schemas.openxmlformats.org/drawingml/2006/main" r:embed="Rd6c8ca5337554614"/>
           <a:stretch xmlns:a="http://schemas.openxmlformats.org/drawingml/2006/main">
             <a:fillRect l="0" t="0" r="0" b="0"/>
           </a:stretch>
@@ -5774,7 +5698,7 @@
           <p:nvPr/>
         </p:nvPicPr>
         <p:blipFill>
-          <a:blip xmlns:r="http://schemas.openxmlformats.org/officeDocument/2006/relationships" xmlns:a="http://schemas.openxmlformats.org/drawingml/2006/main" r:embed="R4bbc6c1ce53743ee"/>
+          <a:blip xmlns:r="http://schemas.openxmlformats.org/officeDocument/2006/relationships" xmlns:a="http://schemas.openxmlformats.org/drawingml/2006/main" r:embed="R0fc2cf5cca464a59"/>
           <a:stretch xmlns:a="http://schemas.openxmlformats.org/drawingml/2006/main">
             <a:fillRect l="0" t="0" r="0" b="0"/>
           </a:stretch>
@@ -7308,7 +7232,7 @@
           <p:nvPr/>
         </p:nvPicPr>
         <p:blipFill>
-          <a:blip xmlns:r="http://schemas.openxmlformats.org/officeDocument/2006/relationships" xmlns:a="http://schemas.openxmlformats.org/drawingml/2006/main" r:embed="R8ad626b167eb41a4"/>
+          <a:blip xmlns:r="http://schemas.openxmlformats.org/officeDocument/2006/relationships" xmlns:a="http://schemas.openxmlformats.org/drawingml/2006/main" r:embed="R6180b85a35e84f3f"/>
           <a:stretch xmlns:a="http://schemas.openxmlformats.org/drawingml/2006/main">
             <a:fillRect l="0" t="0" r="0" b="0"/>
           </a:stretch>
@@ -8477,7 +8401,7 @@
           <p:nvPr/>
         </p:nvPicPr>
         <p:blipFill>
-          <a:blip xmlns:r="http://schemas.openxmlformats.org/officeDocument/2006/relationships" xmlns:a="http://schemas.openxmlformats.org/drawingml/2006/main" r:embed="R5418d20d1fd945b8"/>
+          <a:blip xmlns:r="http://schemas.openxmlformats.org/officeDocument/2006/relationships" xmlns:a="http://schemas.openxmlformats.org/drawingml/2006/main" r:embed="Rd586e6715c4f4409"/>
           <a:stretch xmlns:a="http://schemas.openxmlformats.org/drawingml/2006/main">
             <a:fillRect l="0" t="0" r="0" b="0"/>
           </a:stretch>
@@ -9704,7 +9628,7 @@
           <p:nvPr/>
         </p:nvPicPr>
         <p:blipFill>
-          <a:blip xmlns:r="http://schemas.openxmlformats.org/officeDocument/2006/relationships" xmlns:a="http://schemas.openxmlformats.org/drawingml/2006/main" r:embed="R6abedb7459a0491b"/>
+          <a:blip xmlns:r="http://schemas.openxmlformats.org/officeDocument/2006/relationships" xmlns:a="http://schemas.openxmlformats.org/drawingml/2006/main" r:embed="Rbcd1137f9dc44212"/>
           <a:stretch xmlns:a="http://schemas.openxmlformats.org/drawingml/2006/main">
             <a:fillRect l="0" t="0" r="0" b="0"/>
           </a:stretch>
@@ -10909,7 +10833,7 @@
           <p:nvPr/>
         </p:nvPicPr>
         <p:blipFill>
-          <a:blip xmlns:r="http://schemas.openxmlformats.org/officeDocument/2006/relationships" xmlns:a="http://schemas.openxmlformats.org/drawingml/2006/main" r:embed="Re8e5d3e535874823"/>
+          <a:blip xmlns:r="http://schemas.openxmlformats.org/officeDocument/2006/relationships" xmlns:a="http://schemas.openxmlformats.org/drawingml/2006/main" r:embed="R54293597ef424c9f"/>
           <a:stretch xmlns:a="http://schemas.openxmlformats.org/drawingml/2006/main">
             <a:fillRect l="0" t="0" r="0" b="0"/>
           </a:stretch>
@@ -11188,7 +11112,7 @@
           <p:nvPr/>
         </p:nvPicPr>
         <p:blipFill>
-          <a:blip xmlns:r="http://schemas.openxmlformats.org/officeDocument/2006/relationships" xmlns:a="http://schemas.openxmlformats.org/drawingml/2006/main" r:embed="Rfdc295edd07a4910"/>
+          <a:blip xmlns:r="http://schemas.openxmlformats.org/officeDocument/2006/relationships" xmlns:a="http://schemas.openxmlformats.org/drawingml/2006/main" r:embed="Ra4eaba7c29634751"/>
           <a:stretch xmlns:a="http://schemas.openxmlformats.org/drawingml/2006/main">
             <a:fillRect l="0" t="0" r="0" b="0"/>
           </a:stretch>
@@ -12733,7 +12657,7 @@
           <p:nvPr/>
         </p:nvPicPr>
         <p:blipFill>
-          <a:blip xmlns:r="http://schemas.openxmlformats.org/officeDocument/2006/relationships" xmlns:a="http://schemas.openxmlformats.org/drawingml/2006/main" r:embed="Rcb037cce39ff4a10"/>
+          <a:blip xmlns:r="http://schemas.openxmlformats.org/officeDocument/2006/relationships" xmlns:a="http://schemas.openxmlformats.org/drawingml/2006/main" r:embed="R38f5bfbee8e24531"/>
           <a:stretch xmlns:a="http://schemas.openxmlformats.org/drawingml/2006/main">
             <a:fillRect l="0" t="0" r="0" b="0"/>
           </a:stretch>
@@ -14750,7 +14674,7 @@
           <p:nvPr/>
         </p:nvPicPr>
         <p:blipFill>
-          <a:blip xmlns:r="http://schemas.openxmlformats.org/officeDocument/2006/relationships" xmlns:a="http://schemas.openxmlformats.org/drawingml/2006/main" r:embed="R4f150748243c4499"/>
+          <a:blip xmlns:r="http://schemas.openxmlformats.org/officeDocument/2006/relationships" xmlns:a="http://schemas.openxmlformats.org/drawingml/2006/main" r:embed="Rca7ce224ed7943de"/>
           <a:stretch xmlns:a="http://schemas.openxmlformats.org/drawingml/2006/main">
             <a:fillRect l="0" t="0" r="0" b="0"/>
           </a:stretch>
@@ -15977,7 +15901,7 @@
           <p:nvPr/>
         </p:nvPicPr>
         <p:blipFill>
-          <a:blip xmlns:r="http://schemas.openxmlformats.org/officeDocument/2006/relationships" xmlns:a="http://schemas.openxmlformats.org/drawingml/2006/main" r:embed="Re2e978f5bfca48e8"/>
+          <a:blip xmlns:r="http://schemas.openxmlformats.org/officeDocument/2006/relationships" xmlns:a="http://schemas.openxmlformats.org/drawingml/2006/main" r:embed="R03f0f06c636146d5"/>
           <a:stretch xmlns:a="http://schemas.openxmlformats.org/drawingml/2006/main">
             <a:fillRect l="0" t="0" r="0" b="0"/>
           </a:stretch>
@@ -17118,7 +17042,7 @@
           <p:nvPr/>
         </p:nvPicPr>
         <p:blipFill>
-          <a:blip xmlns:r="http://schemas.openxmlformats.org/officeDocument/2006/relationships" xmlns:a="http://schemas.openxmlformats.org/drawingml/2006/main" r:embed="R323f195ef72a4c1f"/>
+          <a:blip xmlns:r="http://schemas.openxmlformats.org/officeDocument/2006/relationships" xmlns:a="http://schemas.openxmlformats.org/drawingml/2006/main" r:embed="Rf753b2e73cf24b78"/>
           <a:stretch xmlns:a="http://schemas.openxmlformats.org/drawingml/2006/main">
             <a:fillRect l="0" t="0" r="0" b="0"/>
           </a:stretch>
@@ -18583,7 +18507,7 @@
           <p:nvPr/>
         </p:nvPicPr>
         <p:blipFill>
-          <a:blip xmlns:r="http://schemas.openxmlformats.org/officeDocument/2006/relationships" xmlns:a="http://schemas.openxmlformats.org/drawingml/2006/main" r:embed="R02cbe692626348d9"/>
+          <a:blip xmlns:r="http://schemas.openxmlformats.org/officeDocument/2006/relationships" xmlns:a="http://schemas.openxmlformats.org/drawingml/2006/main" r:embed="Re302448b29d24f48"/>
           <a:stretch xmlns:a="http://schemas.openxmlformats.org/drawingml/2006/main">
             <a:fillRect l="0" t="0" r="0" b="0"/>
           </a:stretch>
@@ -18729,7 +18653,7 @@
           <p:nvPr/>
         </p:nvPicPr>
         <p:blipFill>
-          <a:blip xmlns:r="http://schemas.openxmlformats.org/officeDocument/2006/relationships" xmlns:a="http://schemas.openxmlformats.org/drawingml/2006/main" r:embed="R5c92329c140249dd"/>
+          <a:blip xmlns:r="http://schemas.openxmlformats.org/officeDocument/2006/relationships" xmlns:a="http://schemas.openxmlformats.org/drawingml/2006/main" r:embed="Rdb227671b696452b"/>
           <a:stretch xmlns:a="http://schemas.openxmlformats.org/drawingml/2006/main">
             <a:fillRect l="0" t="0" r="0" b="0"/>
           </a:stretch>
@@ -18833,7 +18757,7 @@
                 <a:ea typeface="Aptos Display"/>
                 <a:cs typeface="Aptos Display"/>
               </a:rPr>
-              <a:t>Dari data menuju</a:t>
+              <a:t>AI mempercepat proses,</a:t>
             </a:r>
           </a:p>
           <a:p xmlns:a="http://schemas.openxmlformats.org/drawingml/2006/main">
@@ -18849,7 +18773,7 @@
                 <a:ea typeface="Aptos Display"/>
                 <a:cs typeface="Aptos Display"/>
               </a:rPr>
-              <a:t>keputusan yang dapat diuji</a:t>
+              <a:t>penalaran tetap memimpin</a:t>
             </a:r>
           </a:p>
         </p:txBody>
@@ -18916,7 +18840,7 @@
         </p:spPr>
         <p:txBody>
           <a:bodyPr xmlns:a="http://schemas.openxmlformats.org/drawingml/2006/main" wrap="square" lIns="635" tIns="635" rIns="635" bIns="635" anchor="t">
-            <a:normAutofit fontScale="100000"/>
+            <a:normAutofit fontScale="93620"/>
           </a:bodyPr>
           <a:lstStyle xmlns:a="http://schemas.openxmlformats.org/drawingml/2006/main"/>
           <a:p xmlns:a="http://schemas.openxmlformats.org/drawingml/2006/main">
@@ -18932,7 +18856,7 @@
                 <a:ea typeface="Aptos"/>
                 <a:cs typeface="Aptos"/>
               </a:rPr>
-              <a:t>Analisis Regresi Lanjut menghubungkan teori, data, metode, validasi, dan komunikasi untuk menghasilkan keputusan yang sahih, dapat direplikasi, dan bertanggung jawab.</a:t>
+              <a:t>Analisis Regresi Tingkat Lanjut memadukan teori, data, komputasi, validasi, dan komunikasi. AI mempercepat eksplorasi dan pemeriksaan awal; mahasiswa tetap memverifikasi asumsi, kode, hasil numerik, ketidakpastian, sumber, dan dampak sebelum mengambil keputusan.</a:t>
             </a:r>
           </a:p>
         </p:txBody>
@@ -19102,7 +19026,7 @@
           <p:nvPr/>
         </p:nvPicPr>
         <p:blipFill>
-          <a:blip xmlns:r="http://schemas.openxmlformats.org/officeDocument/2006/relationships" xmlns:a="http://schemas.openxmlformats.org/drawingml/2006/main" r:embed="R1b0d99168c374a6f"/>
+          <a:blip xmlns:r="http://schemas.openxmlformats.org/officeDocument/2006/relationships" xmlns:a="http://schemas.openxmlformats.org/drawingml/2006/main" r:embed="R4ef57b1275144ecb"/>
           <a:stretch xmlns:a="http://schemas.openxmlformats.org/drawingml/2006/main">
             <a:fillRect l="0" t="0" r="0" b="0"/>
           </a:stretch>
@@ -20233,7 +20157,7 @@
           <p:nvPr/>
         </p:nvPicPr>
         <p:blipFill>
-          <a:blip xmlns:r="http://schemas.openxmlformats.org/officeDocument/2006/relationships" xmlns:a="http://schemas.openxmlformats.org/drawingml/2006/main" r:embed="Ra883da6ad6684027"/>
+          <a:blip xmlns:r="http://schemas.openxmlformats.org/officeDocument/2006/relationships" xmlns:a="http://schemas.openxmlformats.org/drawingml/2006/main" r:embed="R0d1d07729b594595"/>
           <a:stretch xmlns:a="http://schemas.openxmlformats.org/drawingml/2006/main">
             <a:fillRect l="0" t="0" r="0" b="0"/>
           </a:stretch>
@@ -22337,7 +22261,7 @@
           <p:nvPr/>
         </p:nvPicPr>
         <p:blipFill>
-          <a:blip xmlns:r="http://schemas.openxmlformats.org/officeDocument/2006/relationships" xmlns:a="http://schemas.openxmlformats.org/drawingml/2006/main" r:embed="Rf572306a1b95453b"/>
+          <a:blip xmlns:r="http://schemas.openxmlformats.org/officeDocument/2006/relationships" xmlns:a="http://schemas.openxmlformats.org/drawingml/2006/main" r:embed="R6612d2c587ab4d6f"/>
           <a:stretch xmlns:a="http://schemas.openxmlformats.org/drawingml/2006/main">
             <a:fillRect l="0" t="0" r="0" b="0"/>
           </a:stretch>
@@ -23619,7 +23543,7 @@
           <p:nvPr/>
         </p:nvPicPr>
         <p:blipFill>
-          <a:blip xmlns:r="http://schemas.openxmlformats.org/officeDocument/2006/relationships" xmlns:a="http://schemas.openxmlformats.org/drawingml/2006/main" r:embed="Rdd0f3272f95d4b30"/>
+          <a:blip xmlns:r="http://schemas.openxmlformats.org/officeDocument/2006/relationships" xmlns:a="http://schemas.openxmlformats.org/drawingml/2006/main" r:embed="R65d09cd20fa247d8"/>
           <a:stretch xmlns:a="http://schemas.openxmlformats.org/drawingml/2006/main">
             <a:fillRect l="0" t="0" r="0" b="0"/>
           </a:stretch>
@@ -23898,7 +23822,7 @@
           <p:nvPr/>
         </p:nvPicPr>
         <p:blipFill>
-          <a:blip xmlns:r="http://schemas.openxmlformats.org/officeDocument/2006/relationships" xmlns:a="http://schemas.openxmlformats.org/drawingml/2006/main" r:embed="Rf520160c2e5f4a80"/>
+          <a:blip xmlns:r="http://schemas.openxmlformats.org/officeDocument/2006/relationships" xmlns:a="http://schemas.openxmlformats.org/drawingml/2006/main" r:embed="R94ec7cfe03bc4460"/>
           <a:stretch xmlns:a="http://schemas.openxmlformats.org/drawingml/2006/main">
             <a:fillRect l="0" t="0" r="0" b="0"/>
           </a:stretch>
@@ -25978,7 +25902,7 @@
           <p:nvPr/>
         </p:nvPicPr>
         <p:blipFill>
-          <a:blip xmlns:r="http://schemas.openxmlformats.org/officeDocument/2006/relationships" xmlns:a="http://schemas.openxmlformats.org/drawingml/2006/main" r:embed="R41053947f61f4b6b"/>
+          <a:blip xmlns:r="http://schemas.openxmlformats.org/officeDocument/2006/relationships" xmlns:a="http://schemas.openxmlformats.org/drawingml/2006/main" r:embed="R5b8521b289604961"/>
           <a:stretch xmlns:a="http://schemas.openxmlformats.org/drawingml/2006/main">
             <a:fillRect l="0" t="0" r="0" b="0"/>
           </a:stretch>
@@ -27391,7 +27315,7 @@
           <p:nvPr/>
         </p:nvPicPr>
         <p:blipFill>
-          <a:blip xmlns:r="http://schemas.openxmlformats.org/officeDocument/2006/relationships" xmlns:a="http://schemas.openxmlformats.org/drawingml/2006/main" r:embed="R98b9e633cfc54189"/>
+          <a:blip xmlns:r="http://schemas.openxmlformats.org/officeDocument/2006/relationships" xmlns:a="http://schemas.openxmlformats.org/drawingml/2006/main" r:embed="R4837f9612cf04874"/>
           <a:stretch xmlns:a="http://schemas.openxmlformats.org/drawingml/2006/main">
             <a:fillRect l="0" t="0" r="0" b="0"/>
           </a:stretch>
